--- a/static/video/opening_public.pptx
+++ b/static/video/opening_public.pptx
@@ -3755,7 +3755,7 @@
               </a:defRPr>
             </a:pPr>
             <a:r>
-              <a:t>https://kowndinya2000.github.io/pl-mpc-site/</a:t>
+              <a:t>https://pl-mpc-humanoid.github.io/</a:t>
             </a:r>
           </a:p>
         </p:txBody>
